--- a/ppt/BigData09-Pandas.pptx
+++ b/ppt/BigData09-Pandas.pptx
@@ -5,19 +5,18 @@
     <p:sldMasterId id="2147483653" r:id="rId1"/>
   </p:sldMasterIdLst>
   <p:notesMasterIdLst>
-    <p:notesMasterId r:id="rId9"/>
+    <p:notesMasterId r:id="rId8"/>
   </p:notesMasterIdLst>
   <p:handoutMasterIdLst>
-    <p:handoutMasterId r:id="rId10"/>
+    <p:handoutMasterId r:id="rId9"/>
   </p:handoutMasterIdLst>
   <p:sldIdLst>
     <p:sldId id="264" r:id="rId2"/>
-    <p:sldId id="277" r:id="rId3"/>
-    <p:sldId id="265" r:id="rId4"/>
-    <p:sldId id="266" r:id="rId5"/>
-    <p:sldId id="274" r:id="rId6"/>
-    <p:sldId id="275" r:id="rId7"/>
-    <p:sldId id="276" r:id="rId8"/>
+    <p:sldId id="265" r:id="rId3"/>
+    <p:sldId id="266" r:id="rId4"/>
+    <p:sldId id="274" r:id="rId5"/>
+    <p:sldId id="275" r:id="rId6"/>
+    <p:sldId id="276" r:id="rId7"/>
   </p:sldIdLst>
   <p:sldSz cx="9144000" cy="6858000" type="screen4x3"/>
   <p:notesSz cx="6648450" cy="9782175"/>
@@ -3793,13 +3792,7 @@
       </p:grpSpPr>
       <p:sp>
         <p:nvSpPr>
-          <p:cNvPr id="2" name="Titre 1">
-            <a:extLst>
-              <a:ext uri="{FF2B5EF4-FFF2-40B4-BE49-F238E27FC236}">
-                <a16:creationId xmlns:a16="http://schemas.microsoft.com/office/drawing/2014/main" id="{CC63970C-D4D0-3216-2450-43DCDA0A8418}"/>
-              </a:ext>
-            </a:extLst>
-          </p:cNvPr>
+          <p:cNvPr id="2" name="Titre 1"/>
           <p:cNvSpPr>
             <a:spLocks noGrp="1"/>
           </p:cNvSpPr>
@@ -3812,19 +3805,16 @@
           <a:bodyPr/>
           <a:lstStyle/>
           <a:p>
-            <a:endParaRPr lang="fr-FR"/>
+            <a:r>
+              <a:rPr lang="fr-FR" dirty="0"/>
+              <a:t>Pandas</a:t>
+            </a:r>
           </a:p>
         </p:txBody>
       </p:sp>
       <p:sp>
         <p:nvSpPr>
-          <p:cNvPr id="3" name="Espace réservé du contenu 2">
-            <a:extLst>
-              <a:ext uri="{FF2B5EF4-FFF2-40B4-BE49-F238E27FC236}">
-                <a16:creationId xmlns:a16="http://schemas.microsoft.com/office/drawing/2014/main" id="{BF345A3D-54B9-F1D9-5F62-31344B147CF6}"/>
-              </a:ext>
-            </a:extLst>
-          </p:cNvPr>
+          <p:cNvPr id="3" name="Espace réservé du contenu 2"/>
           <p:cNvSpPr>
             <a:spLocks noGrp="1"/>
           </p:cNvSpPr>
@@ -3838,16 +3828,68 @@
           <a:lstStyle/>
           <a:p>
             <a:r>
-              <a:rPr lang="fr-FR"/>
-              <a:t>Data Mining</a:t>
-            </a:r>
+              <a:rPr lang="fr-FR" dirty="0"/>
+              <a:t>Python Data </a:t>
+            </a:r>
+            <a:r>
+              <a:rPr lang="fr-FR" dirty="0" err="1"/>
+              <a:t>Analysis</a:t>
+            </a:r>
+            <a:r>
+              <a:rPr lang="fr-FR" dirty="0"/>
+              <a:t> Library</a:t>
+            </a:r>
+          </a:p>
+          <a:p>
+            <a:r>
+              <a:rPr lang="fr-FR" dirty="0"/>
+              <a:t>Module Python</a:t>
+            </a:r>
+          </a:p>
+          <a:p>
+            <a:pPr lvl="1"/>
+            <a:r>
+              <a:rPr lang="fr-FR" dirty="0"/>
+              <a:t>Disponible dans Anaconda</a:t>
+            </a:r>
+          </a:p>
+          <a:p>
+            <a:pPr lvl="1"/>
+            <a:r>
+              <a:rPr lang="fr-FR" dirty="0" err="1"/>
+              <a:t>Pip</a:t>
+            </a:r>
+            <a:r>
+              <a:rPr lang="fr-FR" dirty="0"/>
+              <a:t> </a:t>
+            </a:r>
+            <a:r>
+              <a:rPr lang="fr-FR" dirty="0" err="1"/>
+              <a:t>install</a:t>
+            </a:r>
+            <a:r>
+              <a:rPr lang="fr-FR" dirty="0"/>
+              <a:t> pandas</a:t>
+            </a:r>
+          </a:p>
+          <a:p>
+            <a:pPr lvl="1"/>
+            <a:r>
+              <a:rPr lang="fr-FR" dirty="0"/>
+              <a:t>import pandas as </a:t>
+            </a:r>
+            <a:r>
+              <a:rPr lang="fr-FR" dirty="0" err="1"/>
+              <a:t>pd</a:t>
+            </a:r>
+            <a:endParaRPr lang="fr-FR" dirty="0"/>
           </a:p>
         </p:txBody>
       </p:sp>
     </p:spTree>
     <p:extLst>
       <p:ext uri="{BB962C8B-B14F-4D97-AF65-F5344CB8AC3E}">
-        <p14:creationId xmlns:p14="http://schemas.microsoft.com/office/powerpoint/2010/main" val="2644371872"/>
+        <p14:creationId xmlns:p14="http://schemas.microsoft.com/office/powerpoint/2010/main" val="3495018594"/>
       </p:ext>
     </p:extLst>
   </p:cSld>
@@ -3891,7 +3933,7 @@
           <a:p>
             <a:r>
               <a:rPr lang="fr-FR" dirty="0"/>
-              <a:t>Pandas</a:t>
+              <a:t>Les structures de données</a:t>
             </a:r>
           </a:p>
         </p:txBody>
@@ -3913,67 +3955,96 @@
           <a:p>
             <a:r>
               <a:rPr lang="fr-FR" dirty="0"/>
-              <a:t>Python Data </a:t>
+              <a:t>Pandas fournit 2 structures de données fondamentales</a:t>
+            </a:r>
+          </a:p>
+          <a:p>
+            <a:pPr lvl="1"/>
+            <a:r>
+              <a:rPr lang="fr-FR" dirty="0"/>
+              <a:t>la </a:t>
             </a:r>
             <a:r>
               <a:rPr lang="fr-FR" dirty="0" err="1"/>
-              <a:t>Analysis</a:t>
+              <a:t>Series</a:t>
             </a:r>
             <a:r>
               <a:rPr lang="fr-FR" dirty="0"/>
-              <a:t> Library</a:t>
-            </a:r>
-          </a:p>
-          <a:p>
+              <a:t> et le </a:t>
+            </a:r>
+            <a:r>
+              <a:rPr lang="fr-FR" dirty="0" err="1"/>
+              <a:t>DataFrame</a:t>
+            </a:r>
             <a:r>
               <a:rPr lang="fr-FR" dirty="0"/>
-              <a:t>Module Python</a:t>
+              <a:t> </a:t>
             </a:r>
           </a:p>
           <a:p>
             <a:pPr lvl="1"/>
             <a:r>
               <a:rPr lang="fr-FR" dirty="0"/>
-              <a:t>Disponible dans Anaconda</a:t>
-            </a:r>
+              <a:t>On peut voir ces structures comme une généralisation des tableaux et des matrices de </a:t>
+            </a:r>
+            <a:r>
+              <a:rPr lang="fr-FR" dirty="0" err="1"/>
+              <a:t>Numpy</a:t>
+            </a:r>
+            <a:endParaRPr lang="fr-FR" dirty="0"/>
           </a:p>
           <a:p>
             <a:pPr lvl="1"/>
             <a:r>
+              <a:rPr lang="fr-FR" dirty="0"/>
+              <a:t>La différence fondamentale entre ces structures et les versions de </a:t>
+            </a:r>
+            <a:r>
               <a:rPr lang="fr-FR" dirty="0" err="1"/>
-              <a:t>Pip</a:t>
+              <a:t>Numpy</a:t>
             </a:r>
             <a:r>
               <a:rPr lang="fr-FR" dirty="0"/>
-              <a:t> </a:t>
+              <a:t> est que les objets Pandas possèdent des indices explicites</a:t>
+            </a:r>
+          </a:p>
+          <a:p>
+            <a:pPr lvl="1"/>
+            <a:r>
+              <a:rPr lang="fr-FR" dirty="0"/>
+              <a:t>Là où on ne pouvait se référer à un élément d'un tableau </a:t>
             </a:r>
             <a:r>
               <a:rPr lang="fr-FR" dirty="0" err="1"/>
-              <a:t>install</a:t>
+              <a:t>Numpy</a:t>
             </a:r>
             <a:r>
               <a:rPr lang="fr-FR" dirty="0"/>
-              <a:t> pandas</a:t>
-            </a:r>
-          </a:p>
-          <a:p>
-            <a:pPr lvl="1"/>
+              <a:t> que par sa position dans le tableau, chaque élément d'une </a:t>
+            </a:r>
+            <a:r>
+              <a:rPr lang="fr-FR" dirty="0" err="1"/>
+              <a:t>Series</a:t>
+            </a:r>
             <a:r>
               <a:rPr lang="fr-FR" dirty="0"/>
-              <a:t>import pandas as </a:t>
+              <a:t> ou d'un </a:t>
             </a:r>
             <a:r>
               <a:rPr lang="fr-FR" dirty="0" err="1"/>
-              <a:t>pd</a:t>
-            </a:r>
-            <a:endParaRPr lang="fr-FR" dirty="0"/>
+              <a:t>DataFrame</a:t>
+            </a:r>
+            <a:r>
+              <a:rPr lang="fr-FR" dirty="0"/>
+              <a:t> peut avoir un indice explicitement désigné par l'utilisateur</a:t>
+            </a:r>
           </a:p>
         </p:txBody>
       </p:sp>
     </p:spTree>
     <p:extLst>
       <p:ext uri="{BB962C8B-B14F-4D97-AF65-F5344CB8AC3E}">
-        <p14:creationId xmlns:p14="http://schemas.microsoft.com/office/powerpoint/2010/main" val="3495018594"/>
+        <p14:creationId xmlns:p14="http://schemas.microsoft.com/office/powerpoint/2010/main" val="1027414011"/>
       </p:ext>
     </p:extLst>
   </p:cSld>
@@ -4017,7 +4088,7 @@
           <a:p>
             <a:r>
               <a:rPr lang="fr-FR" dirty="0"/>
-              <a:t>Les structures de données</a:t>
+              <a:t>Import de données</a:t>
             </a:r>
           </a:p>
         </p:txBody>
@@ -4039,96 +4110,164 @@
           <a:p>
             <a:r>
               <a:rPr lang="fr-FR" dirty="0"/>
-              <a:t>Pandas fournit 2 structures de données fondamentales</a:t>
+              <a:t>Pandas possède une librairie très puissante pour importer des données depuis n’importe quelle source</a:t>
             </a:r>
           </a:p>
           <a:p>
             <a:pPr lvl="1"/>
             <a:r>
               <a:rPr lang="fr-FR" dirty="0"/>
-              <a:t>la </a:t>
-            </a:r>
-            <a:r>
-              <a:rPr lang="fr-FR" dirty="0" err="1"/>
-              <a:t>Series</a:t>
-            </a:r>
-            <a:r>
-              <a:rPr lang="fr-FR" dirty="0"/>
-              <a:t> et le </a:t>
+              <a:t>Puis les converti en </a:t>
             </a:r>
             <a:r>
               <a:rPr lang="fr-FR" dirty="0" err="1"/>
               <a:t>DataFrame</a:t>
             </a:r>
+            <a:endParaRPr lang="fr-FR" dirty="0"/>
+          </a:p>
+          <a:p>
             <a:r>
               <a:rPr lang="fr-FR" dirty="0"/>
-              <a:t> </a:t>
+              <a:t>CSV</a:t>
+            </a:r>
+          </a:p>
+          <a:p>
+            <a:pPr marL="457200" lvl="1" indent="0">
+              <a:buNone/>
+            </a:pPr>
+            <a:r>
+              <a:rPr lang="fr-FR" sz="2000" dirty="0" err="1">
+                <a:latin typeface="Courier New" panose="02070309020205020404" pitchFamily="49" charset="0"/>
+                <a:cs typeface="Courier New" panose="02070309020205020404" pitchFamily="49" charset="0"/>
+              </a:rPr>
+              <a:t>house_data</a:t>
+            </a:r>
+            <a:r>
+              <a:rPr lang="fr-FR" sz="2000" dirty="0">
+                <a:latin typeface="Courier New" panose="02070309020205020404" pitchFamily="49" charset="0"/>
+                <a:cs typeface="Courier New" panose="02070309020205020404" pitchFamily="49" charset="0"/>
+              </a:rPr>
+              <a:t> = </a:t>
+            </a:r>
+            <a:r>
+              <a:rPr lang="fr-FR" sz="2000" dirty="0" err="1">
+                <a:latin typeface="Courier New" panose="02070309020205020404" pitchFamily="49" charset="0"/>
+                <a:cs typeface="Courier New" panose="02070309020205020404" pitchFamily="49" charset="0"/>
+              </a:rPr>
+              <a:t>pd.read_csv</a:t>
+            </a:r>
+            <a:r>
+              <a:rPr lang="fr-FR" sz="2000" dirty="0">
+                <a:latin typeface="Courier New" panose="02070309020205020404" pitchFamily="49" charset="0"/>
+                <a:cs typeface="Courier New" panose="02070309020205020404" pitchFamily="49" charset="0"/>
+              </a:rPr>
+              <a:t>('house.csv')</a:t>
+            </a:r>
+          </a:p>
+          <a:p>
+            <a:pPr marL="457200" lvl="1" indent="0">
+              <a:buNone/>
+            </a:pPr>
+            <a:r>
+              <a:rPr lang="fr-FR" sz="2000" dirty="0" err="1">
+                <a:latin typeface="Courier New" panose="02070309020205020404" pitchFamily="49" charset="0"/>
+                <a:cs typeface="Courier New" panose="02070309020205020404" pitchFamily="49" charset="0"/>
+              </a:rPr>
+              <a:t>plt.plot</a:t>
+            </a:r>
+            <a:r>
+              <a:rPr lang="fr-FR" sz="2000" dirty="0">
+                <a:latin typeface="Courier New" panose="02070309020205020404" pitchFamily="49" charset="0"/>
+                <a:cs typeface="Courier New" panose="02070309020205020404" pitchFamily="49" charset="0"/>
+              </a:rPr>
+              <a:t>(</a:t>
+            </a:r>
+            <a:r>
+              <a:rPr lang="fr-FR" sz="2000" dirty="0" err="1">
+                <a:latin typeface="Courier New" panose="02070309020205020404" pitchFamily="49" charset="0"/>
+                <a:cs typeface="Courier New" panose="02070309020205020404" pitchFamily="49" charset="0"/>
+              </a:rPr>
+              <a:t>house_data</a:t>
+            </a:r>
+            <a:r>
+              <a:rPr lang="fr-FR" sz="2000" dirty="0">
+                <a:latin typeface="Courier New" panose="02070309020205020404" pitchFamily="49" charset="0"/>
+                <a:cs typeface="Courier New" panose="02070309020205020404" pitchFamily="49" charset="0"/>
+              </a:rPr>
+              <a:t>['surface'], </a:t>
+            </a:r>
+            <a:r>
+              <a:rPr lang="fr-FR" sz="2000" dirty="0" err="1">
+                <a:latin typeface="Courier New" panose="02070309020205020404" pitchFamily="49" charset="0"/>
+                <a:cs typeface="Courier New" panose="02070309020205020404" pitchFamily="49" charset="0"/>
+              </a:rPr>
+              <a:t>house_data</a:t>
+            </a:r>
+            <a:r>
+              <a:rPr lang="fr-FR" sz="2000" dirty="0">
+                <a:latin typeface="Courier New" panose="02070309020205020404" pitchFamily="49" charset="0"/>
+                <a:cs typeface="Courier New" panose="02070309020205020404" pitchFamily="49" charset="0"/>
+              </a:rPr>
+              <a:t>['loyer'], '</a:t>
+            </a:r>
+            <a:r>
+              <a:rPr lang="fr-FR" sz="2000" dirty="0" err="1">
+                <a:latin typeface="Courier New" panose="02070309020205020404" pitchFamily="49" charset="0"/>
+                <a:cs typeface="Courier New" panose="02070309020205020404" pitchFamily="49" charset="0"/>
+              </a:rPr>
+              <a:t>ro</a:t>
+            </a:r>
+            <a:r>
+              <a:rPr lang="fr-FR" sz="2000" dirty="0">
+                <a:latin typeface="Courier New" panose="02070309020205020404" pitchFamily="49" charset="0"/>
+                <a:cs typeface="Courier New" panose="02070309020205020404" pitchFamily="49" charset="0"/>
+              </a:rPr>
+              <a:t>', </a:t>
+            </a:r>
+            <a:r>
+              <a:rPr lang="fr-FR" sz="2000" dirty="0" err="1">
+                <a:latin typeface="Courier New" panose="02070309020205020404" pitchFamily="49" charset="0"/>
+                <a:cs typeface="Courier New" panose="02070309020205020404" pitchFamily="49" charset="0"/>
+              </a:rPr>
+              <a:t>markersize</a:t>
+            </a:r>
+            <a:r>
+              <a:rPr lang="fr-FR" sz="2000" dirty="0">
+                <a:latin typeface="Courier New" panose="02070309020205020404" pitchFamily="49" charset="0"/>
+                <a:cs typeface="Courier New" panose="02070309020205020404" pitchFamily="49" charset="0"/>
+              </a:rPr>
+              <a:t>=4)</a:t>
+            </a:r>
+          </a:p>
+          <a:p>
+            <a:pPr marL="457200" lvl="1" indent="0">
+              <a:buNone/>
+            </a:pPr>
+            <a:r>
+              <a:rPr lang="fr-FR" sz="2000" dirty="0" err="1">
+                <a:latin typeface="Courier New" panose="02070309020205020404" pitchFamily="49" charset="0"/>
+                <a:cs typeface="Courier New" panose="02070309020205020404" pitchFamily="49" charset="0"/>
+              </a:rPr>
+              <a:t>plt.show</a:t>
+            </a:r>
+            <a:r>
+              <a:rPr lang="fr-FR" sz="2000" dirty="0">
+                <a:latin typeface="Courier New" panose="02070309020205020404" pitchFamily="49" charset="0"/>
+                <a:cs typeface="Courier New" panose="02070309020205020404" pitchFamily="49" charset="0"/>
+              </a:rPr>
+              <a:t>()</a:t>
             </a:r>
           </a:p>
           <a:p>
             <a:pPr lvl="1"/>
-            <a:r>
-              <a:rPr lang="fr-FR" dirty="0"/>
-              <a:t>On peut voir ces structures comme une généralisation des tableaux et des matrices de </a:t>
-            </a:r>
-            <a:r>
-              <a:rPr lang="fr-FR" dirty="0" err="1"/>
-              <a:t>Numpy</a:t>
-            </a:r>
             <a:endParaRPr lang="fr-FR" dirty="0"/>
-          </a:p>
-          <a:p>
-            <a:pPr lvl="1"/>
-            <a:r>
-              <a:rPr lang="fr-FR" dirty="0"/>
-              <a:t>La différence fondamentale entre ces structures et les versions de </a:t>
-            </a:r>
-            <a:r>
-              <a:rPr lang="fr-FR" dirty="0" err="1"/>
-              <a:t>Numpy</a:t>
-            </a:r>
-            <a:r>
-              <a:rPr lang="fr-FR" dirty="0"/>
-              <a:t> est que les objets Pandas possèdent des indices explicites</a:t>
-            </a:r>
-          </a:p>
-          <a:p>
-            <a:pPr lvl="1"/>
-            <a:r>
-              <a:rPr lang="fr-FR" dirty="0"/>
-              <a:t>Là où on ne pouvait se référer à un élément d'un tableau </a:t>
-            </a:r>
-            <a:r>
-              <a:rPr lang="fr-FR" dirty="0" err="1"/>
-              <a:t>Numpy</a:t>
-            </a:r>
-            <a:r>
-              <a:rPr lang="fr-FR" dirty="0"/>
-              <a:t> que par sa position dans le tableau, chaque élément d'une </a:t>
-            </a:r>
-            <a:r>
-              <a:rPr lang="fr-FR" dirty="0" err="1"/>
-              <a:t>Series</a:t>
-            </a:r>
-            <a:r>
-              <a:rPr lang="fr-FR" dirty="0"/>
-              <a:t> ou d'un </a:t>
-            </a:r>
-            <a:r>
-              <a:rPr lang="fr-FR" dirty="0" err="1"/>
-              <a:t>DataFrame</a:t>
-            </a:r>
-            <a:r>
-              <a:rPr lang="fr-FR" dirty="0"/>
-              <a:t> peut avoir un indice explicitement désigné par l'utilisateur</a:t>
-            </a:r>
           </a:p>
         </p:txBody>
       </p:sp>
     </p:spTree>
     <p:extLst>
       <p:ext uri="{BB962C8B-B14F-4D97-AF65-F5344CB8AC3E}">
-        <p14:creationId xmlns:p14="http://schemas.microsoft.com/office/powerpoint/2010/main" val="1027414011"/>
+        <p14:creationId xmlns:p14="http://schemas.microsoft.com/office/powerpoint/2010/main" val="3356451382"/>
       </p:ext>
     </p:extLst>
   </p:cSld>
@@ -4194,229 +4333,6 @@
           <a:p>
             <a:r>
               <a:rPr lang="fr-FR" dirty="0"/>
-              <a:t>Pandas possède une librairie très puissante pour importer des données depuis n’importe quelle source</a:t>
-            </a:r>
-          </a:p>
-          <a:p>
-            <a:pPr lvl="1"/>
-            <a:r>
-              <a:rPr lang="fr-FR" dirty="0"/>
-              <a:t>Puis les converti en </a:t>
-            </a:r>
-            <a:r>
-              <a:rPr lang="fr-FR" dirty="0" err="1"/>
-              <a:t>DataFrame</a:t>
-            </a:r>
-            <a:endParaRPr lang="fr-FR" dirty="0"/>
-          </a:p>
-          <a:p>
-            <a:r>
-              <a:rPr lang="fr-FR" dirty="0"/>
-              <a:t>CSV</a:t>
-            </a:r>
-          </a:p>
-          <a:p>
-            <a:pPr marL="457200" lvl="1" indent="0">
-              <a:buNone/>
-            </a:pPr>
-            <a:r>
-              <a:rPr lang="fr-FR" sz="2000" dirty="0" err="1">
-                <a:latin typeface="Courier New" panose="02070309020205020404" pitchFamily="49" charset="0"/>
-                <a:cs typeface="Courier New" panose="02070309020205020404" pitchFamily="49" charset="0"/>
-              </a:rPr>
-              <a:t>house_data</a:t>
-            </a:r>
-            <a:r>
-              <a:rPr lang="fr-FR" sz="2000" dirty="0">
-                <a:latin typeface="Courier New" panose="02070309020205020404" pitchFamily="49" charset="0"/>
-                <a:cs typeface="Courier New" panose="02070309020205020404" pitchFamily="49" charset="0"/>
-              </a:rPr>
-              <a:t> = </a:t>
-            </a:r>
-            <a:r>
-              <a:rPr lang="fr-FR" sz="2000" dirty="0" err="1">
-                <a:latin typeface="Courier New" panose="02070309020205020404" pitchFamily="49" charset="0"/>
-                <a:cs typeface="Courier New" panose="02070309020205020404" pitchFamily="49" charset="0"/>
-              </a:rPr>
-              <a:t>pd.read_csv</a:t>
-            </a:r>
-            <a:r>
-              <a:rPr lang="fr-FR" sz="2000" dirty="0">
-                <a:latin typeface="Courier New" panose="02070309020205020404" pitchFamily="49" charset="0"/>
-                <a:cs typeface="Courier New" panose="02070309020205020404" pitchFamily="49" charset="0"/>
-              </a:rPr>
-              <a:t>('house.csv')</a:t>
-            </a:r>
-          </a:p>
-          <a:p>
-            <a:pPr marL="457200" lvl="1" indent="0">
-              <a:buNone/>
-            </a:pPr>
-            <a:r>
-              <a:rPr lang="fr-FR" sz="2000" dirty="0" err="1">
-                <a:latin typeface="Courier New" panose="02070309020205020404" pitchFamily="49" charset="0"/>
-                <a:cs typeface="Courier New" panose="02070309020205020404" pitchFamily="49" charset="0"/>
-              </a:rPr>
-              <a:t>plt.plot</a:t>
-            </a:r>
-            <a:r>
-              <a:rPr lang="fr-FR" sz="2000" dirty="0">
-                <a:latin typeface="Courier New" panose="02070309020205020404" pitchFamily="49" charset="0"/>
-                <a:cs typeface="Courier New" panose="02070309020205020404" pitchFamily="49" charset="0"/>
-              </a:rPr>
-              <a:t>(</a:t>
-            </a:r>
-            <a:r>
-              <a:rPr lang="fr-FR" sz="2000" dirty="0" err="1">
-                <a:latin typeface="Courier New" panose="02070309020205020404" pitchFamily="49" charset="0"/>
-                <a:cs typeface="Courier New" panose="02070309020205020404" pitchFamily="49" charset="0"/>
-              </a:rPr>
-              <a:t>house_data</a:t>
-            </a:r>
-            <a:r>
-              <a:rPr lang="fr-FR" sz="2000" dirty="0">
-                <a:latin typeface="Courier New" panose="02070309020205020404" pitchFamily="49" charset="0"/>
-                <a:cs typeface="Courier New" panose="02070309020205020404" pitchFamily="49" charset="0"/>
-              </a:rPr>
-              <a:t>['surface'], </a:t>
-            </a:r>
-            <a:r>
-              <a:rPr lang="fr-FR" sz="2000" dirty="0" err="1">
-                <a:latin typeface="Courier New" panose="02070309020205020404" pitchFamily="49" charset="0"/>
-                <a:cs typeface="Courier New" panose="02070309020205020404" pitchFamily="49" charset="0"/>
-              </a:rPr>
-              <a:t>house_data</a:t>
-            </a:r>
-            <a:r>
-              <a:rPr lang="fr-FR" sz="2000" dirty="0">
-                <a:latin typeface="Courier New" panose="02070309020205020404" pitchFamily="49" charset="0"/>
-                <a:cs typeface="Courier New" panose="02070309020205020404" pitchFamily="49" charset="0"/>
-              </a:rPr>
-              <a:t>['loyer'], '</a:t>
-            </a:r>
-            <a:r>
-              <a:rPr lang="fr-FR" sz="2000" dirty="0" err="1">
-                <a:latin typeface="Courier New" panose="02070309020205020404" pitchFamily="49" charset="0"/>
-                <a:cs typeface="Courier New" panose="02070309020205020404" pitchFamily="49" charset="0"/>
-              </a:rPr>
-              <a:t>ro</a:t>
-            </a:r>
-            <a:r>
-              <a:rPr lang="fr-FR" sz="2000" dirty="0">
-                <a:latin typeface="Courier New" panose="02070309020205020404" pitchFamily="49" charset="0"/>
-                <a:cs typeface="Courier New" panose="02070309020205020404" pitchFamily="49" charset="0"/>
-              </a:rPr>
-              <a:t>', </a:t>
-            </a:r>
-            <a:r>
-              <a:rPr lang="fr-FR" sz="2000" dirty="0" err="1">
-                <a:latin typeface="Courier New" panose="02070309020205020404" pitchFamily="49" charset="0"/>
-                <a:cs typeface="Courier New" panose="02070309020205020404" pitchFamily="49" charset="0"/>
-              </a:rPr>
-              <a:t>markersize</a:t>
-            </a:r>
-            <a:r>
-              <a:rPr lang="fr-FR" sz="2000" dirty="0">
-                <a:latin typeface="Courier New" panose="02070309020205020404" pitchFamily="49" charset="0"/>
-                <a:cs typeface="Courier New" panose="02070309020205020404" pitchFamily="49" charset="0"/>
-              </a:rPr>
-              <a:t>=4)</a:t>
-            </a:r>
-          </a:p>
-          <a:p>
-            <a:pPr marL="457200" lvl="1" indent="0">
-              <a:buNone/>
-            </a:pPr>
-            <a:r>
-              <a:rPr lang="fr-FR" sz="2000" dirty="0" err="1">
-                <a:latin typeface="Courier New" panose="02070309020205020404" pitchFamily="49" charset="0"/>
-                <a:cs typeface="Courier New" panose="02070309020205020404" pitchFamily="49" charset="0"/>
-              </a:rPr>
-              <a:t>plt.show</a:t>
-            </a:r>
-            <a:r>
-              <a:rPr lang="fr-FR" sz="2000" dirty="0">
-                <a:latin typeface="Courier New" panose="02070309020205020404" pitchFamily="49" charset="0"/>
-                <a:cs typeface="Courier New" panose="02070309020205020404" pitchFamily="49" charset="0"/>
-              </a:rPr>
-              <a:t>()</a:t>
-            </a:r>
-          </a:p>
-          <a:p>
-            <a:pPr lvl="1"/>
-            <a:endParaRPr lang="fr-FR" dirty="0"/>
-          </a:p>
-        </p:txBody>
-      </p:sp>
-    </p:spTree>
-    <p:extLst>
-      <p:ext uri="{BB962C8B-B14F-4D97-AF65-F5344CB8AC3E}">
-        <p14:creationId xmlns:p14="http://schemas.microsoft.com/office/powerpoint/2010/main" val="3356451382"/>
-      </p:ext>
-    </p:extLst>
-  </p:cSld>
-  <p:clrMapOvr>
-    <a:masterClrMapping/>
-  </p:clrMapOvr>
-</p:sld>
-</file>
-
-<file path=ppt/slides/slide6.xml><?xml version="1.0" encoding="utf-8"?>
-<p:sld xmlns:a="http://schemas.openxmlformats.org/drawingml/2006/main" xmlns:r="http://schemas.openxmlformats.org/officeDocument/2006/relationships" xmlns:p="http://schemas.openxmlformats.org/presentationml/2006/main">
-  <p:cSld>
-    <p:spTree>
-      <p:nvGrpSpPr>
-        <p:cNvPr id="1" name=""/>
-        <p:cNvGrpSpPr/>
-        <p:nvPr/>
-      </p:nvGrpSpPr>
-      <p:grpSpPr>
-        <a:xfrm>
-          <a:off x="0" y="0"/>
-          <a:ext cx="0" cy="0"/>
-          <a:chOff x="0" y="0"/>
-          <a:chExt cx="0" cy="0"/>
-        </a:xfrm>
-      </p:grpSpPr>
-      <p:sp>
-        <p:nvSpPr>
-          <p:cNvPr id="2" name="Titre 1"/>
-          <p:cNvSpPr>
-            <a:spLocks noGrp="1"/>
-          </p:cNvSpPr>
-          <p:nvPr>
-            <p:ph type="title"/>
-          </p:nvPr>
-        </p:nvSpPr>
-        <p:spPr/>
-        <p:txBody>
-          <a:bodyPr/>
-          <a:lstStyle/>
-          <a:p>
-            <a:r>
-              <a:rPr lang="fr-FR" dirty="0"/>
-              <a:t>Import de données</a:t>
-            </a:r>
-          </a:p>
-        </p:txBody>
-      </p:sp>
-      <p:sp>
-        <p:nvSpPr>
-          <p:cNvPr id="3" name="Espace réservé du contenu 2"/>
-          <p:cNvSpPr>
-            <a:spLocks noGrp="1"/>
-          </p:cNvSpPr>
-          <p:nvPr>
-            <p:ph idx="1"/>
-          </p:nvPr>
-        </p:nvSpPr>
-        <p:spPr/>
-        <p:txBody>
-          <a:bodyPr/>
-          <a:lstStyle/>
-          <a:p>
-            <a:r>
-              <a:rPr lang="fr-FR" dirty="0"/>
               <a:t>SQL</a:t>
             </a:r>
           </a:p>
@@ -4708,7 +4624,7 @@
 </p:sld>
 </file>
 
-<file path=ppt/slides/slide7.xml><?xml version="1.0" encoding="utf-8"?>
+<file path=ppt/slides/slide6.xml><?xml version="1.0" encoding="utf-8"?>
 <p:sld xmlns:a="http://schemas.openxmlformats.org/drawingml/2006/main" xmlns:r="http://schemas.openxmlformats.org/officeDocument/2006/relationships" xmlns:p="http://schemas.openxmlformats.org/presentationml/2006/main">
   <p:cSld>
     <p:spTree>
